--- a/presentation/team/DID_v2.pptx
+++ b/presentation/team/DID_v2.pptx
@@ -134,7 +134,7 @@
   <p:extLst>
     <p:ext uri="{521415D9-36F7-43E2-AB2F-B90AF26B5E84}">
       <p14:sectionLst xmlns:p14="http://schemas.microsoft.com/office/powerpoint/2010/main">
-        <p14:section name="Основной поток" id="{0d590cdc-ee98-2b6c-79e2-c31a8ffa26ef}">
+        <p14:section name="Основной поток" id="{1677f077-5e89-0c75-1d4a-713d04ba0053}">
           <p14:sldIdLst>
             <p14:sldId id="256"/>
             <p14:sldId id="257"/>
@@ -152,7 +152,7 @@
             <p14:sldId id="269"/>
           </p14:sldIdLst>
         </p14:section>
-        <p14:section name="Варианты на выбор" id="{f426419f-9f66-1c68-c9a6-c941075ece17}">
+        <p14:section name="Варианты на выбор" id="{3e01c494-ad4b-6e50-8575-08e403fc0db1}">
           <p14:sldIdLst>
             <p14:sldId id="270"/>
             <p14:sldId id="271"/>
@@ -162,7 +162,7 @@
             <p14:sldId id="275"/>
           </p14:sldIdLst>
         </p14:section>
-        <p14:section name="Запасные слайды" id="{6e7d5c95-50e1-73f2-6aba-b1db73b92505}">
+        <p14:section name="Запасные слайды" id="{a6fe1754-6fd1-d9c5-ea9d-6a3bb2522224}">
           <p14:sldIdLst>
             <p14:sldId id="276"/>
             <p14:sldId id="277"/>
@@ -1004,7 +1004,7 @@
           <a:p>
             <a:r>
               <a:rPr lang="en-US" dirty="0"/>
-              <a:t>≈ 25 с. Датчик образцов зашумел — тоже без объявления. Слева робот продолжает ехать по шумным показаниям: за это время он проезжает четыре метра и тратит двадцать две единицы заряда из шестидесяти — и на последний образец заряда не хватает. Справа робот распознал сбой и переждал: потратил четыре единицы и собрал все семь. В среднем это даёт шесть очков.</a:t>
+              <a:t>≈ 25 с. Датчик образцов зашумел — тоже без объявления. Слева робот продолжает ехать по шумным показаниям: за это время он проезжает четыре метра и тратит двадцать две единицы заряда из шестидесяти — и на последний образец заряда не хватает. Справа робот сбой переждал: потратил четыре единицы и собрал все семь. Сбой замечают оба — различие в том, что делать дальше. В среднем это даёт шесть очков.</a:t>
             </a:r>
             <a:endParaRPr lang="en-US" dirty="0"/>
           </a:p>
@@ -1092,7 +1092,7 @@
           <a:p>
             <a:r>
               <a:rPr lang="en-US" dirty="0"/>
-              <a:t>≈ 40 с. Миссию задаём словами: после первого штрафа — сразу домой. На двадцать седьмой секунде оба робота задевают опасную зону. Правило текста не читает и собирает дальше — миссия нарушена. Языковая модель видит в сводке состояния штраф, сверяет с миссией и возвращает одну подцель: на базу. Это настоящий ответ модели с сервера МАИ. На сорока восьми таких прогонах модель выполняет миссию в сорока пяти — сорока шести, правило — ни разу.</a:t>
+              <a:t>≈ 40 с. Миссию задаём словами: после первого штрафа — сразу домой. На двадцать седьмой секунде оба робота задевают опасную зону. Правило текста не читает и собирает дальше — миссия нарушена. Языковая модель видит в сводке состояния штраф, сверяет с миссией и возвращает одну подцель: на базу. Это настоящий ответ модели с сервера МАИ. Всего по четырём типам миссий модель выполняет сорок пять — сорок шесть прогонов из сорока восьми, правило — ни одного. Выигрыш здесь — выполненная миссия, а не очки судьи.</a:t>
             </a:r>
             <a:endParaRPr lang="en-US" dirty="0"/>
           </a:p>
@@ -1180,7 +1180,7 @@
           <a:p>
             <a:r>
               <a:rPr lang="en-US" dirty="0"/>
-              <a:t>≈ 30 с. Сводим всё на одну шкалу. Главное подтвердилось: исследователь против плана заранее — плюс тринадцать. Распознавание сбоя датчика, контроль его исправности и запас на возврат по оценке пути — тоже в плюсе. А учёт дорогого грунта и реакция на его смену выигрыша не показали: интервалы включают ноль, и мы это говорим прямо. В Gazebo показной сценарий пройден шесть раз из шести.</a:t>
+              <a:t>≈ 30 с. Сводим всё на одну шкалу. Главное подтвердилось: робот с адаптацией против плана заранее — плюс тринадцать. Пережидание сбоя датчика, контроль его исправности, запас на возврат по оценке пути и память о лаборатории между прогонами — тоже в плюсе. А учёт дорогого грунта и реакция на его смену выигрыша не показали: интервалы включают ноль, и мы это говорим прямо. В Gazebo показной сценарий пройден шесть раз из шести засчитанных.</a:t>
             </a:r>
             <a:endParaRPr lang="en-US" dirty="0"/>
           </a:p>
@@ -1268,7 +1268,7 @@
           <a:p>
             <a:r>
               <a:rPr lang="en-US" dirty="0"/>
-              <a:t>≈ 30 с. С агентами мы работали как в лаборатории. Человек задаёт цель, роли и ограничения. Ведущий агент ведёт план и сводит код. Исследователи читают литературу, инженеры пишут код и ставят опыты, а независимая модель проверяет каждую работу. Девятнадцать работ из двадцати ревью вернуло на доработку — в этом и смысл: качество держится на процессе, а не на вере в один ответ модели.</a:t>
+              <a:t>≈ 30 с. С агентами мы работали как в лаборатории. Человек задаёт цель, роли и ограничения. Ведущий агент ведёт план и сводит код. Исследователи читают литературу, инженеры пишут код и ставят опыты, а независимая модель проверяет каждую работу. Почти все работы — двадцать одну из двадцати двух — ревью вернуло на доработку, и в этом смысл: качество держится на процессе, а не на вере в один ответ модели.</a:t>
             </a:r>
             <a:endParaRPr lang="en-US" dirty="0"/>
           </a:p>
@@ -1444,7 +1444,7 @@
           <a:p>
             <a:r>
               <a:rPr lang="en-US" dirty="0"/>
-              <a:t>≈ 35 с. Гипотеза из двух частей. Первая: исследователь наберёт больше, чем робот с планом заранее, — подтвердилась. Вторая — за счёт чего: мы ожидали, что выигрыш дают все механизмы, уточняющие знание о среде. Подтвердилось для датчика и запаса на возврат, а для грунта — нет.</a:t>
+              <a:t>≈ 35 с. Гипотеза из двух частей. Первая: робот с адаптацией наберёт больше, чем робот с планом заранее, — подтвердилась. Вторая — за счёт чего: мы ожидали, что выигрыш дают все механизмы, уточняющие знание о среде. Подтвердилось для датчика и запаса на возврат; для грунта выигрыш не показан.</a:t>
             </a:r>
             <a:endParaRPr lang="en-US" dirty="0"/>
           </a:p>
@@ -1620,7 +1620,7 @@
           <a:p>
             <a:r>
               <a:rPr lang="en-US" dirty="0"/>
-              <a:t>≈ 40 с. Покажу формулы на числах одного прогона. Датчик показал ноль пятьдесят три — значит, образец в девяноста пяти сантиметрах. Расход пять и семь при прогнозе два и девять — грунт дороже вдвое. Из опытов выбран тот, что даёт больше информации на единицу заряда. И счёт: семь образцов, возврат и остаток заряда — девяносто один и восемь.</a:t>
+              <a:t>≈ 40 с. Покажу формулы на числах одного прогона. Датчик показал ноль пятьдесят три — значит, образец примерно в девяноста пяти сантиметрах. Расход пять и семь при прогнозе два и девять — грунт дороже вдвое. Из опытов выбран тот, что даёт больше информации на единицу заряда. И счёт: семь образцов, возврат и остаток заряда — девяносто один и восемь.</a:t>
             </a:r>
             <a:endParaRPr lang="en-US" dirty="0"/>
           </a:p>
@@ -1796,7 +1796,7 @@
           <a:p>
             <a:r>
               <a:rPr lang="en-US" dirty="0"/>
-              <a:t>≈ 25 с. Готово всё, что требует условие, и три бонусных трека. Дальше — гипотезы от языковой модели внутри контура, память между прогонами и проверка на настоящем роботе.</a:t>
+              <a:t>≈ 25 с. Готово всё, что требует условие, бонусные треки и память о лаборатории между прогонами. Дальше — гипотезы от языковой модели внутри контура и проверка на настоящем роботе.</a:t>
             </a:r>
             <a:endParaRPr lang="en-US" dirty="0"/>
           </a:p>
@@ -2236,7 +2236,7 @@
           <a:p>
             <a:r>
               <a:rPr lang="en-US" dirty="0"/>
-              <a:t>≈ 30 с. Гипотеза одна и проверяемая: робот, который по ходу прогона сверяет ожидания с данными и перестраивает поиск, наберёт больше очков, чем робот с планом, составленным заранее. Проверяем на одних и тех же сорока сценариях, смотрим разность счёта. Опровержение — если интервал разности включает ноль. Итог: плюс тринадцать очков, интервал от семи до девятнадцати.</a:t>
+              <a:t>≈ 30 с. Гипотеза одна и проверяемая: робот, который по ходу прогона сверяет ожидания с данными и перестраивает поиск, наберёт больше очков, чем робот с планом, составленным заранее. Проверяем на одних и тех же сорока сценариях, смотрим разность счёта. Опровержение — если интервал разности целиком ниже нуля; если он включает ноль, выигрыш не показан. Итог в быстром симуляторе: плюс тринадцать очков, интервал от семи до девятнадцати.</a:t>
             </a:r>
             <a:endParaRPr lang="en-US" dirty="0"/>
           </a:p>
@@ -3822,7 +3822,7 @@
                 <a:ea typeface="Inter" pitchFamily="34" charset="-122"/>
                 <a:cs typeface="Inter" pitchFamily="34" charset="-120"/>
               </a:rPr>
-              <a:t>Без распознавания сбоя</a:t>
+              <a:t>Без пережидания сбоя</a:t>
             </a:r>
             <a:endParaRPr lang="en-US" sz="1100" dirty="0"/>
           </a:p>
@@ -3884,7 +3884,7 @@
                 <a:ea typeface="Inter" pitchFamily="34" charset="-122"/>
                 <a:cs typeface="Inter" pitchFamily="34" charset="-120"/>
               </a:rPr>
-              <a:t>Распознал сбой и переждал</a:t>
+              <a:t>Пережидает сбой</a:t>
             </a:r>
             <a:endParaRPr lang="en-US" sz="1100" dirty="0"/>
           </a:p>
@@ -4045,7 +4045,27 @@
                 <a:ea typeface="Inter" pitchFamily="34" charset="-122"/>
                 <a:cs typeface="Inter" pitchFamily="34" charset="-120"/>
               </a:rPr>
-              <a:t>40 новых трудных сценариев</a:t>
+              <a:t>40 новых сценариев,</a:t>
+            </a:r>
+            <a:endParaRPr lang="en-US" sz="1000" dirty="0"/>
+          </a:p>
+          <a:p>
+            <a:pPr algn="ctr" indent="0" marL="0">
+              <a:spcAft>
+                <a:spcPts val="200"/>
+              </a:spcAft>
+              <a:buNone/>
+            </a:pPr>
+            <a:r>
+              <a:rPr lang="en-US" sz="1000" dirty="0">
+                <a:solidFill>
+                  <a:schemeClr val="tx1"/>
+                </a:solidFill>
+                <a:latin typeface="Inter" pitchFamily="34" charset="0"/>
+                <a:ea typeface="Inter" pitchFamily="34" charset="-122"/>
+                <a:cs typeface="Inter" pitchFamily="34" charset="-120"/>
+              </a:rPr>
+              <a:t>быстрый симулятор</a:t>
             </a:r>
             <a:endParaRPr lang="en-US" sz="1000" dirty="0"/>
           </a:p>
@@ -4106,7 +4126,7 @@
                 <a:ea typeface="Inter" pitchFamily="34" charset="-122"/>
                 <a:cs typeface="Inter" pitchFamily="34" charset="-120"/>
               </a:rPr>
-              <a:t>Расчёт робота: стоять — 0,01 ед/с, ехать по шумным показаниям — около 0,23 ед/с впустую. Поэтому он ждёт</a:t>
+              <a:t>Расчёт робота в этом прогоне: стоять — 0,01 ед/с, ехать по шумным показаниям — около 0,28 ед/с впустую. Поэтому он ждёт</a:t>
             </a:r>
             <a:endParaRPr lang="en-US" sz="1050" dirty="0"/>
           </a:p>
@@ -4261,7 +4281,7 @@
                 <a:ea typeface="Inter" pitchFamily="34" charset="-122"/>
                 <a:cs typeface="Inter" pitchFamily="34" charset="-120"/>
               </a:rPr>
-              <a:t>Одна карта, один агент; различается только то, кто выбирает подцели: правило или языковая модель</a:t>
+              <a:t>Один исполнитель; подцели выбирает правило (текст миссии не читает) или языковая модель</a:t>
             </a:r>
             <a:endParaRPr lang="en-US" sz="1150" dirty="0"/>
           </a:p>
@@ -4661,7 +4681,7 @@
         <p:spPr>
           <a:xfrm>
             <a:off x="4983480" y="3703320"/>
-            <a:ext cx="3493008" cy="201168"/>
+            <a:ext cx="3493008" cy="329184"/>
           </a:xfrm>
           <a:prstGeom prst="rect">
             <a:avLst/>
@@ -4685,7 +4705,7 @@
                 <a:ea typeface="Inter" pitchFamily="34" charset="-122"/>
                 <a:cs typeface="Inter" pitchFamily="34" charset="-120"/>
               </a:rPr>
-              <a:t>миссий выполняет каждая из трёх моделей МАИ; правило — 0 из 48</a:t>
+              <a:t>прогонов по четырём миссиям выполняет каждая из трёх моделей МАИ; правило — 0 из 48</a:t>
             </a:r>
             <a:endParaRPr lang="en-US" sz="1000" dirty="0"/>
           </a:p>
@@ -4724,7 +4744,7 @@
                 <a:ea typeface="Inter" pitchFamily="34" charset="-122"/>
                 <a:cs typeface="Inter" pitchFamily="34" charset="-120"/>
               </a:rPr>
-              <a:t>Быстрый симулятор; время ответа модели в этом опыте не учитывается. На обычной миссии модель выбирает то же, что правило; ответ идёт 15–25 с, поэтому на показе решает правило</a:t>
+              <a:t>Быстрый симулятор; время ответа модели не учитывается. Модель получает текст миссии и сводку состояния со счётчиком штрафов. На обычной миссии модель выбирает то же, что правило; ответ идёт 15–25 с, поэтому на показе решает правило</a:t>
             </a:r>
             <a:endParaRPr lang="en-US" sz="950" dirty="0"/>
           </a:p>
@@ -4893,8 +4913,8 @@
         </p:nvSpPr>
         <p:spPr>
           <a:xfrm>
-            <a:off x="6199632" y="1298448"/>
-            <a:ext cx="0" cy="2240280"/>
+            <a:off x="6199632" y="1280160"/>
+            <a:ext cx="0" cy="2377440"/>
           </a:xfrm>
           <a:prstGeom prst="line">
             <a:avLst/>
@@ -4916,7 +4936,7 @@
         </p:nvSpPr>
         <p:spPr>
           <a:xfrm>
-            <a:off x="5394960" y="3566160"/>
+            <a:off x="5394960" y="3685032"/>
             <a:ext cx="548640" cy="164592"/>
           </a:xfrm>
           <a:prstGeom prst="rect">
@@ -4955,7 +4975,7 @@
         </p:nvSpPr>
         <p:spPr>
           <a:xfrm>
-            <a:off x="5925312" y="3566160"/>
+            <a:off x="5925312" y="3685032"/>
             <a:ext cx="548640" cy="164592"/>
           </a:xfrm>
           <a:prstGeom prst="rect">
@@ -4994,7 +5014,7 @@
         </p:nvSpPr>
         <p:spPr>
           <a:xfrm>
-            <a:off x="6455664" y="3566160"/>
+            <a:off x="6455664" y="3685032"/>
             <a:ext cx="548640" cy="164592"/>
           </a:xfrm>
           <a:prstGeom prst="rect">
@@ -5033,7 +5053,7 @@
         </p:nvSpPr>
         <p:spPr>
           <a:xfrm>
-            <a:off x="6986016" y="3566160"/>
+            <a:off x="6986016" y="3685032"/>
             <a:ext cx="548640" cy="164592"/>
           </a:xfrm>
           <a:prstGeom prst="rect">
@@ -5072,7 +5092,7 @@
         </p:nvSpPr>
         <p:spPr>
           <a:xfrm>
-            <a:off x="7516368" y="3566160"/>
+            <a:off x="7516368" y="3685032"/>
             <a:ext cx="548640" cy="164592"/>
           </a:xfrm>
           <a:prstGeom prst="rect">
@@ -5111,7 +5131,7 @@
         </p:nvSpPr>
         <p:spPr>
           <a:xfrm>
-            <a:off x="8046720" y="3566160"/>
+            <a:off x="8046720" y="3685032"/>
             <a:ext cx="548640" cy="164592"/>
           </a:xfrm>
           <a:prstGeom prst="rect">
@@ -5150,8 +5170,8 @@
         </p:nvSpPr>
         <p:spPr>
           <a:xfrm>
-            <a:off x="667512" y="1298448"/>
-            <a:ext cx="2926080" cy="320040"/>
+            <a:off x="667512" y="1280160"/>
+            <a:ext cx="2926080" cy="297180"/>
           </a:xfrm>
           <a:prstGeom prst="rect">
             <a:avLst/>
@@ -5175,7 +5195,7 @@
                 <a:ea typeface="Inter" pitchFamily="34" charset="-122"/>
                 <a:cs typeface="Inter" pitchFamily="34" charset="-120"/>
               </a:rPr>
-              <a:t>Исследователь против плана заранее</a:t>
+              <a:t>С адаптацией против плана заранее</a:t>
             </a:r>
             <a:endParaRPr lang="en-US" sz="1100" dirty="0"/>
           </a:p>
@@ -5189,8 +5209,8 @@
         </p:nvSpPr>
         <p:spPr>
           <a:xfrm>
-            <a:off x="3611880" y="1298448"/>
-            <a:ext cx="1417320" cy="320040"/>
+            <a:off x="3611880" y="1280160"/>
+            <a:ext cx="1417320" cy="297180"/>
           </a:xfrm>
           <a:prstGeom prst="rect">
             <a:avLst/>
@@ -5228,8 +5248,8 @@
         </p:nvSpPr>
         <p:spPr>
           <a:xfrm>
-            <a:off x="5029200" y="1298448"/>
-            <a:ext cx="685800" cy="320040"/>
+            <a:off x="5029200" y="1280160"/>
+            <a:ext cx="685800" cy="297180"/>
           </a:xfrm>
           <a:prstGeom prst="rect">
             <a:avLst/>
@@ -5256,7 +5276,7 @@
         </p:nvSpPr>
         <p:spPr>
           <a:xfrm>
-            <a:off x="6984553" y="1458468"/>
+            <a:off x="6984553" y="1428750"/>
             <a:ext cx="1230417" cy="0"/>
           </a:xfrm>
           <a:prstGeom prst="line">
@@ -5279,7 +5299,7 @@
         </p:nvSpPr>
         <p:spPr>
           <a:xfrm>
-            <a:off x="7550932" y="1399032"/>
+            <a:off x="7550932" y="1369314"/>
             <a:ext cx="118872" cy="118872"/>
           </a:xfrm>
           <a:prstGeom prst="ellipse">
@@ -5304,8 +5324,8 @@
         </p:nvSpPr>
         <p:spPr>
           <a:xfrm>
-            <a:off x="667512" y="1618488"/>
-            <a:ext cx="2926080" cy="320040"/>
+            <a:off x="667512" y="1577340"/>
+            <a:ext cx="2926080" cy="297180"/>
           </a:xfrm>
           <a:prstGeom prst="rect">
             <a:avLst/>
@@ -5329,7 +5349,7 @@
                 <a:ea typeface="Inter" pitchFamily="34" charset="-122"/>
                 <a:cs typeface="Inter" pitchFamily="34" charset="-120"/>
               </a:rPr>
-              <a:t>Распознаёт сбой датчика и пережидает</a:t>
+              <a:t>Пережидает сбой датчика</a:t>
             </a:r>
             <a:endParaRPr lang="en-US" sz="1100" dirty="0"/>
           </a:p>
@@ -5343,8 +5363,8 @@
         </p:nvSpPr>
         <p:spPr>
           <a:xfrm>
-            <a:off x="3611880" y="1618488"/>
-            <a:ext cx="1417320" cy="320040"/>
+            <a:off x="3611880" y="1577340"/>
+            <a:ext cx="1417320" cy="297180"/>
           </a:xfrm>
           <a:prstGeom prst="rect">
             <a:avLst/>
@@ -5382,8 +5402,8 @@
         </p:nvSpPr>
         <p:spPr>
           <a:xfrm>
-            <a:off x="5029200" y="1618488"/>
-            <a:ext cx="685800" cy="320040"/>
+            <a:off x="5029200" y="1577340"/>
+            <a:ext cx="685800" cy="297180"/>
           </a:xfrm>
           <a:prstGeom prst="rect">
             <a:avLst/>
@@ -5410,7 +5430,7 @@
         </p:nvSpPr>
         <p:spPr>
           <a:xfrm>
-            <a:off x="6507236" y="1778508"/>
+            <a:off x="6507236" y="1725930"/>
             <a:ext cx="731886" cy="0"/>
           </a:xfrm>
           <a:prstGeom prst="line">
@@ -5433,7 +5453,7 @@
         </p:nvSpPr>
         <p:spPr>
           <a:xfrm>
-            <a:off x="6819047" y="1719072"/>
+            <a:off x="6819047" y="1666494"/>
             <a:ext cx="118872" cy="118872"/>
           </a:xfrm>
           <a:prstGeom prst="ellipse">
@@ -5458,8 +5478,8 @@
         </p:nvSpPr>
         <p:spPr>
           <a:xfrm>
-            <a:off x="667512" y="1938528"/>
-            <a:ext cx="2926080" cy="320040"/>
+            <a:off x="667512" y="1874520"/>
+            <a:ext cx="2926080" cy="297180"/>
           </a:xfrm>
           <a:prstGeom prst="rect">
             <a:avLst/>
@@ -5497,8 +5517,8 @@
         </p:nvSpPr>
         <p:spPr>
           <a:xfrm>
-            <a:off x="3611880" y="1938528"/>
-            <a:ext cx="1417320" cy="320040"/>
+            <a:off x="3611880" y="1874520"/>
+            <a:ext cx="1417320" cy="297180"/>
           </a:xfrm>
           <a:prstGeom prst="rect">
             <a:avLst/>
@@ -5536,8 +5556,8 @@
         </p:nvSpPr>
         <p:spPr>
           <a:xfrm>
-            <a:off x="5029200" y="1938528"/>
-            <a:ext cx="685800" cy="320040"/>
+            <a:off x="5029200" y="1874520"/>
+            <a:ext cx="685800" cy="297180"/>
           </a:xfrm>
           <a:prstGeom prst="rect">
             <a:avLst/>
@@ -5564,7 +5584,7 @@
         </p:nvSpPr>
         <p:spPr>
           <a:xfrm>
-            <a:off x="6379952" y="2098548"/>
+            <a:off x="6379952" y="2023110"/>
             <a:ext cx="689458" cy="0"/>
           </a:xfrm>
           <a:prstGeom prst="line">
@@ -5587,7 +5607,7 @@
         </p:nvSpPr>
         <p:spPr>
           <a:xfrm>
-            <a:off x="6659941" y="2039112"/>
+            <a:off x="6659941" y="1963674"/>
             <a:ext cx="118872" cy="118872"/>
           </a:xfrm>
           <a:prstGeom prst="ellipse">
@@ -5612,8 +5632,8 @@
         </p:nvSpPr>
         <p:spPr>
           <a:xfrm>
-            <a:off x="667512" y="2258568"/>
-            <a:ext cx="2926080" cy="320040"/>
+            <a:off x="667512" y="2171700"/>
+            <a:ext cx="2926080" cy="297180"/>
           </a:xfrm>
           <a:prstGeom prst="rect">
             <a:avLst/>
@@ -5651,8 +5671,8 @@
         </p:nvSpPr>
         <p:spPr>
           <a:xfrm>
-            <a:off x="3611880" y="2258568"/>
-            <a:ext cx="1417320" cy="320040"/>
+            <a:off x="3611880" y="2171700"/>
+            <a:ext cx="1417320" cy="297180"/>
           </a:xfrm>
           <a:prstGeom prst="rect">
             <a:avLst/>
@@ -5690,8 +5710,8 @@
         </p:nvSpPr>
         <p:spPr>
           <a:xfrm>
-            <a:off x="5029200" y="2258568"/>
-            <a:ext cx="685800" cy="320040"/>
+            <a:off x="5029200" y="2171700"/>
+            <a:ext cx="685800" cy="297180"/>
           </a:xfrm>
           <a:prstGeom prst="rect">
             <a:avLst/>
@@ -5718,7 +5738,7 @@
         </p:nvSpPr>
         <p:spPr>
           <a:xfrm>
-            <a:off x="6369345" y="2418588"/>
+            <a:off x="6369345" y="2320290"/>
             <a:ext cx="424282" cy="0"/>
           </a:xfrm>
           <a:prstGeom prst="line">
@@ -5741,7 +5761,7 @@
         </p:nvSpPr>
         <p:spPr>
           <a:xfrm>
-            <a:off x="6522049" y="2359152"/>
+            <a:off x="6522049" y="2260854"/>
             <a:ext cx="118872" cy="118872"/>
           </a:xfrm>
           <a:prstGeom prst="ellipse">
@@ -5766,8 +5786,8 @@
         </p:nvSpPr>
         <p:spPr>
           <a:xfrm>
-            <a:off x="667512" y="2578608"/>
-            <a:ext cx="2926080" cy="320040"/>
+            <a:off x="667512" y="2468880"/>
+            <a:ext cx="2926080" cy="297180"/>
           </a:xfrm>
           <a:prstGeom prst="rect">
             <a:avLst/>
@@ -5791,7 +5811,7 @@
                 <a:ea typeface="Inter" pitchFamily="34" charset="-122"/>
                 <a:cs typeface="Inter" pitchFamily="34" charset="-120"/>
               </a:rPr>
-              <a:t>Учитывает дорогой грунт</a:t>
+              <a:t>Помнит лабораторию: второй прогон</a:t>
             </a:r>
             <a:endParaRPr lang="en-US" sz="1100" dirty="0"/>
           </a:p>
@@ -5805,8 +5825,8 @@
         </p:nvSpPr>
         <p:spPr>
           <a:xfrm>
-            <a:off x="3611880" y="2578608"/>
-            <a:ext cx="1417320" cy="320040"/>
+            <a:off x="3611880" y="2468880"/>
+            <a:ext cx="1417320" cy="297180"/>
           </a:xfrm>
           <a:prstGeom prst="rect">
             <a:avLst/>
@@ -5824,13 +5844,13 @@
             <a:r>
               <a:rPr lang="en-US" sz="1000" dirty="0">
                 <a:solidFill>
-                  <a:schemeClr val="tx2"/>
-                </a:solidFill>
-                <a:latin typeface="Inter" pitchFamily="34" charset="0"/>
-                <a:ea typeface="Inter" pitchFamily="34" charset="-122"/>
-                <a:cs typeface="Inter" pitchFamily="34" charset="-120"/>
-              </a:rPr>
-              <a:t>+1,0 [−3,6; +5,4]</a:t>
+                  <a:schemeClr val="tx1"/>
+                </a:solidFill>
+                <a:latin typeface="Inter" pitchFamily="34" charset="0"/>
+                <a:ea typeface="Inter" pitchFamily="34" charset="-122"/>
+                <a:cs typeface="Inter" pitchFamily="34" charset="-120"/>
+              </a:rPr>
+              <a:t>+4,3 [+2,4; +6,3]</a:t>
             </a:r>
             <a:endParaRPr lang="en-US" sz="1000" dirty="0"/>
           </a:p>
@@ -5844,8 +5864,8 @@
         </p:nvSpPr>
         <p:spPr>
           <a:xfrm>
-            <a:off x="5029200" y="2578608"/>
-            <a:ext cx="685800" cy="320040"/>
+            <a:off x="5029200" y="2468880"/>
+            <a:ext cx="685800" cy="297180"/>
           </a:xfrm>
           <a:prstGeom prst="rect">
             <a:avLst/>
@@ -5860,17 +5880,6 @@
             <a:pPr indent="0" marL="0">
               <a:buNone/>
             </a:pPr>
-            <a:r>
-              <a:rPr lang="en-US" sz="900" dirty="0">
-                <a:solidFill>
-                  <a:schemeClr val="tx2"/>
-                </a:solidFill>
-                <a:latin typeface="Inter" pitchFamily="34" charset="0"/>
-                <a:ea typeface="Inter" pitchFamily="34" charset="-122"/>
-                <a:cs typeface="Inter" pitchFamily="34" charset="-120"/>
-              </a:rPr>
-              <a:t>не показано</a:t>
-            </a:r>
             <a:endParaRPr lang="en-US" sz="900" dirty="0"/>
           </a:p>
         </p:txBody>
@@ -5883,7 +5892,172 @@
         </p:nvSpPr>
         <p:spPr>
           <a:xfrm>
-            <a:off x="5817779" y="2738628"/>
+            <a:off x="6454201" y="2617470"/>
+            <a:ext cx="413675" cy="0"/>
+          </a:xfrm>
+          <a:prstGeom prst="line">
+            <a:avLst/>
+          </a:prstGeom>
+          <a:noFill/>
+          <a:ln w="38100">
+            <a:solidFill>
+              <a:schemeClr val="accent4"/>
+            </a:solidFill>
+            <a:prstDash val="solid"/>
+          </a:ln>
+        </p:spPr>
+      </p:sp>
+      <p:sp>
+        <p:nvSpPr>
+          <p:cNvPr id="36" name="res-5-dot"/>
+          <p:cNvSpPr/>
+          <p:nvPr/>
+        </p:nvSpPr>
+        <p:spPr>
+          <a:xfrm>
+            <a:off x="6596299" y="2558034"/>
+            <a:ext cx="118872" cy="118872"/>
+          </a:xfrm>
+          <a:prstGeom prst="ellipse">
+            <a:avLst/>
+          </a:prstGeom>
+          <a:solidFill>
+            <a:schemeClr val="accent4"/>
+          </a:solidFill>
+          <a:ln w="12700">
+            <a:solidFill>
+              <a:srgbClr val="FFFFFF"/>
+            </a:solidFill>
+            <a:prstDash val="solid"/>
+          </a:ln>
+        </p:spPr>
+      </p:sp>
+      <p:sp>
+        <p:nvSpPr>
+          <p:cNvPr id="37" name="res-6-label"/>
+          <p:cNvSpPr txBox="1"/>
+          <p:nvPr/>
+        </p:nvSpPr>
+        <p:spPr>
+          <a:xfrm>
+            <a:off x="667512" y="2766060"/>
+            <a:ext cx="2926080" cy="297180"/>
+          </a:xfrm>
+          <a:prstGeom prst="rect">
+            <a:avLst/>
+          </a:prstGeom>
+          <a:noFill/>
+          <a:ln/>
+        </p:spPr>
+        <p:txBody>
+          <a:bodyPr wrap="square" lIns="0" tIns="0" rIns="0" bIns="0" rtlCol="0" anchor="ctr"/>
+          <a:lstStyle/>
+          <a:p>
+            <a:pPr indent="0" marL="0">
+              <a:buNone/>
+            </a:pPr>
+            <a:r>
+              <a:rPr lang="en-US" sz="1100" dirty="0">
+                <a:solidFill>
+                  <a:schemeClr val="tx1"/>
+                </a:solidFill>
+                <a:latin typeface="Inter" pitchFamily="34" charset="0"/>
+                <a:ea typeface="Inter" pitchFamily="34" charset="-122"/>
+                <a:cs typeface="Inter" pitchFamily="34" charset="-120"/>
+              </a:rPr>
+              <a:t>Учитывает дорогой грунт</a:t>
+            </a:r>
+            <a:endParaRPr lang="en-US" sz="1100" dirty="0"/>
+          </a:p>
+        </p:txBody>
+      </p:sp>
+      <p:sp>
+        <p:nvSpPr>
+          <p:cNvPr id="38" name="res-6-value"/>
+          <p:cNvSpPr txBox="1"/>
+          <p:nvPr/>
+        </p:nvSpPr>
+        <p:spPr>
+          <a:xfrm>
+            <a:off x="3611880" y="2766060"/>
+            <a:ext cx="1417320" cy="297180"/>
+          </a:xfrm>
+          <a:prstGeom prst="rect">
+            <a:avLst/>
+          </a:prstGeom>
+          <a:noFill/>
+          <a:ln/>
+        </p:spPr>
+        <p:txBody>
+          <a:bodyPr wrap="square" lIns="0" tIns="0" rIns="0" bIns="0" rtlCol="0" anchor="ctr"/>
+          <a:lstStyle/>
+          <a:p>
+            <a:pPr indent="0" marL="0">
+              <a:buNone/>
+            </a:pPr>
+            <a:r>
+              <a:rPr lang="en-US" sz="1000" dirty="0">
+                <a:solidFill>
+                  <a:schemeClr val="tx2"/>
+                </a:solidFill>
+                <a:latin typeface="Inter" pitchFamily="34" charset="0"/>
+                <a:ea typeface="Inter" pitchFamily="34" charset="-122"/>
+                <a:cs typeface="Inter" pitchFamily="34" charset="-120"/>
+              </a:rPr>
+              <a:t>+1,0 [−3,6; +5,4]</a:t>
+            </a:r>
+            <a:endParaRPr lang="en-US" sz="1000" dirty="0"/>
+          </a:p>
+        </p:txBody>
+      </p:sp>
+      <p:sp>
+        <p:nvSpPr>
+          <p:cNvPr id="39" name="res-6-mark"/>
+          <p:cNvSpPr txBox="1"/>
+          <p:nvPr/>
+        </p:nvSpPr>
+        <p:spPr>
+          <a:xfrm>
+            <a:off x="5029200" y="2766060"/>
+            <a:ext cx="685800" cy="297180"/>
+          </a:xfrm>
+          <a:prstGeom prst="rect">
+            <a:avLst/>
+          </a:prstGeom>
+          <a:noFill/>
+          <a:ln/>
+        </p:spPr>
+        <p:txBody>
+          <a:bodyPr wrap="square" lIns="0" tIns="0" rIns="0" bIns="0" rtlCol="0" anchor="ctr"/>
+          <a:lstStyle/>
+          <a:p>
+            <a:pPr indent="0" marL="0">
+              <a:buNone/>
+            </a:pPr>
+            <a:r>
+              <a:rPr lang="en-US" sz="900" dirty="0">
+                <a:solidFill>
+                  <a:schemeClr val="tx2"/>
+                </a:solidFill>
+                <a:latin typeface="Inter" pitchFamily="34" charset="0"/>
+                <a:ea typeface="Inter" pitchFamily="34" charset="-122"/>
+                <a:cs typeface="Inter" pitchFamily="34" charset="-120"/>
+              </a:rPr>
+              <a:t>не показано</a:t>
+            </a:r>
+            <a:endParaRPr lang="en-US" sz="900" dirty="0"/>
+          </a:p>
+        </p:txBody>
+      </p:sp>
+      <p:sp>
+        <p:nvSpPr>
+          <p:cNvPr id="40" name="res-6-ci"/>
+          <p:cNvSpPr/>
+          <p:nvPr/>
+        </p:nvSpPr>
+        <p:spPr>
+          <a:xfrm>
+            <a:off x="5817779" y="2914650"/>
             <a:ext cx="954634" cy="0"/>
           </a:xfrm>
           <a:prstGeom prst="line">
@@ -5900,13 +6074,13 @@
       </p:sp>
       <p:sp>
         <p:nvSpPr>
-          <p:cNvPr id="36" name="res-5-dot"/>
+          <p:cNvPr id="41" name="res-6-dot"/>
           <p:cNvSpPr/>
           <p:nvPr/>
         </p:nvSpPr>
         <p:spPr>
           <a:xfrm>
-            <a:off x="6246266" y="2679192"/>
+            <a:off x="6246266" y="2855214"/>
             <a:ext cx="118872" cy="118872"/>
           </a:xfrm>
           <a:prstGeom prst="ellipse">
@@ -5925,14 +6099,14 @@
       </p:sp>
       <p:sp>
         <p:nvSpPr>
-          <p:cNvPr id="37" name="res-6-label"/>
-          <p:cNvSpPr txBox="1"/>
-          <p:nvPr/>
-        </p:nvSpPr>
-        <p:spPr>
-          <a:xfrm>
-            <a:off x="667512" y="2898648"/>
-            <a:ext cx="2926080" cy="320040"/>
+          <p:cNvPr id="42" name="res-7-label"/>
+          <p:cNvSpPr txBox="1"/>
+          <p:nvPr/>
+        </p:nvSpPr>
+        <p:spPr>
+          <a:xfrm>
+            <a:off x="667512" y="3063240"/>
+            <a:ext cx="2926080" cy="297180"/>
           </a:xfrm>
           <a:prstGeom prst="rect">
             <a:avLst/>
@@ -5964,14 +6138,14 @@
       </p:sp>
       <p:sp>
         <p:nvSpPr>
-          <p:cNvPr id="38" name="res-6-value"/>
-          <p:cNvSpPr txBox="1"/>
-          <p:nvPr/>
-        </p:nvSpPr>
-        <p:spPr>
-          <a:xfrm>
-            <a:off x="3611880" y="2898648"/>
-            <a:ext cx="1417320" cy="320040"/>
+          <p:cNvPr id="43" name="res-7-value"/>
+          <p:cNvSpPr txBox="1"/>
+          <p:nvPr/>
+        </p:nvSpPr>
+        <p:spPr>
+          <a:xfrm>
+            <a:off x="3611880" y="3063240"/>
+            <a:ext cx="1417320" cy="297180"/>
           </a:xfrm>
           <a:prstGeom prst="rect">
             <a:avLst/>
@@ -6003,14 +6177,14 @@
       </p:sp>
       <p:sp>
         <p:nvSpPr>
-          <p:cNvPr id="39" name="res-6-mark"/>
-          <p:cNvSpPr txBox="1"/>
-          <p:nvPr/>
-        </p:nvSpPr>
-        <p:spPr>
-          <a:xfrm>
-            <a:off x="5029200" y="2898648"/>
-            <a:ext cx="685800" cy="320040"/>
+          <p:cNvPr id="44" name="res-7-mark"/>
+          <p:cNvSpPr txBox="1"/>
+          <p:nvPr/>
+        </p:nvSpPr>
+        <p:spPr>
+          <a:xfrm>
+            <a:off x="5029200" y="3063240"/>
+            <a:ext cx="685800" cy="297180"/>
           </a:xfrm>
           <a:prstGeom prst="rect">
             <a:avLst/>
@@ -6042,13 +6216,13 @@
       </p:sp>
       <p:sp>
         <p:nvSpPr>
-          <p:cNvPr id="40" name="res-6-dot"/>
+          <p:cNvPr id="45" name="res-7-dot"/>
           <p:cNvSpPr/>
           <p:nvPr/>
         </p:nvSpPr>
         <p:spPr>
           <a:xfrm>
-            <a:off x="6142317" y="2999232"/>
+            <a:off x="6142317" y="3152394"/>
             <a:ext cx="118872" cy="118872"/>
           </a:xfrm>
           <a:prstGeom prst="ellipse">
@@ -6067,14 +6241,14 @@
       </p:sp>
       <p:sp>
         <p:nvSpPr>
-          <p:cNvPr id="41" name="res-7-label"/>
-          <p:cNvSpPr txBox="1"/>
-          <p:nvPr/>
-        </p:nvSpPr>
-        <p:spPr>
-          <a:xfrm>
-            <a:off x="667512" y="3218688"/>
-            <a:ext cx="2926080" cy="320040"/>
+          <p:cNvPr id="46" name="res-8-label"/>
+          <p:cNvSpPr txBox="1"/>
+          <p:nvPr/>
+        </p:nvSpPr>
+        <p:spPr>
+          <a:xfrm>
+            <a:off x="667512" y="3360420"/>
+            <a:ext cx="2926080" cy="297180"/>
           </a:xfrm>
           <a:prstGeom prst="rect">
             <a:avLst/>
@@ -6106,14 +6280,14 @@
       </p:sp>
       <p:sp>
         <p:nvSpPr>
-          <p:cNvPr id="42" name="res-7-value"/>
-          <p:cNvSpPr txBox="1"/>
-          <p:nvPr/>
-        </p:nvSpPr>
-        <p:spPr>
-          <a:xfrm>
-            <a:off x="3611880" y="3218688"/>
-            <a:ext cx="1417320" cy="320040"/>
+          <p:cNvPr id="47" name="res-8-value"/>
+          <p:cNvSpPr txBox="1"/>
+          <p:nvPr/>
+        </p:nvSpPr>
+        <p:spPr>
+          <a:xfrm>
+            <a:off x="3611880" y="3360420"/>
+            <a:ext cx="1417320" cy="297180"/>
           </a:xfrm>
           <a:prstGeom prst="rect">
             <a:avLst/>
@@ -6145,14 +6319,14 @@
       </p:sp>
       <p:sp>
         <p:nvSpPr>
-          <p:cNvPr id="43" name="res-7-mark"/>
-          <p:cNvSpPr txBox="1"/>
-          <p:nvPr/>
-        </p:nvSpPr>
-        <p:spPr>
-          <a:xfrm>
-            <a:off x="5029200" y="3218688"/>
-            <a:ext cx="685800" cy="320040"/>
+          <p:cNvPr id="48" name="res-8-mark"/>
+          <p:cNvSpPr txBox="1"/>
+          <p:nvPr/>
+        </p:nvSpPr>
+        <p:spPr>
+          <a:xfrm>
+            <a:off x="5029200" y="3360420"/>
+            <a:ext cx="685800" cy="297180"/>
           </a:xfrm>
           <a:prstGeom prst="rect">
             <a:avLst/>
@@ -6184,13 +6358,13 @@
       </p:sp>
       <p:sp>
         <p:nvSpPr>
-          <p:cNvPr id="44" name="res-7-ci"/>
+          <p:cNvPr id="49" name="res-8-ci"/>
           <p:cNvSpPr/>
           <p:nvPr/>
         </p:nvSpPr>
         <p:spPr>
           <a:xfrm>
-            <a:off x="5913242" y="3378708"/>
+            <a:off x="5913242" y="3509010"/>
             <a:ext cx="487924" cy="0"/>
           </a:xfrm>
           <a:prstGeom prst="line">
@@ -6207,13 +6381,13 @@
       </p:sp>
       <p:sp>
         <p:nvSpPr>
-          <p:cNvPr id="45" name="res-7-dot"/>
+          <p:cNvPr id="50" name="res-8-dot"/>
           <p:cNvSpPr/>
           <p:nvPr/>
         </p:nvSpPr>
         <p:spPr>
           <a:xfrm>
-            <a:off x="6097768" y="3319272"/>
+            <a:off x="6097768" y="3449574"/>
             <a:ext cx="118872" cy="118872"/>
           </a:xfrm>
           <a:prstGeom prst="ellipse">
@@ -6232,13 +6406,13 @@
       </p:sp>
       <p:sp>
         <p:nvSpPr>
-          <p:cNvPr id="46" name="res-note"/>
-          <p:cNvSpPr txBox="1"/>
-          <p:nvPr/>
-        </p:nvSpPr>
-        <p:spPr>
-          <a:xfrm>
-            <a:off x="667512" y="3575304"/>
+          <p:cNvPr id="51" name="res-note"/>
+          <p:cNvSpPr txBox="1"/>
+          <p:nvPr/>
+        </p:nvSpPr>
+        <p:spPr>
+          <a:xfrm>
+            <a:off x="667512" y="3685032"/>
             <a:ext cx="4754880" cy="182880"/>
           </a:xfrm>
           <a:prstGeom prst="rect">
@@ -6263,7 +6437,7 @@
                 <a:ea typeface="Inter" pitchFamily="34" charset="-122"/>
                 <a:cs typeface="Inter" pitchFamily="34" charset="-120"/>
               </a:rPr>
-              <a:t>Числа из разных опытов (E1, P1, E2, R10, A1): между собой не складываются</a:t>
+              <a:t>Опыты разные: числа не складывать. Смена грунта — разность разностей</a:t>
             </a:r>
             <a:endParaRPr lang="en-US" sz="950" dirty="0"/>
           </a:p>
@@ -6271,18 +6445,18 @@
       </p:sp>
       <p:sp>
         <p:nvSpPr>
-          <p:cNvPr id="47" name="tile-1"/>
+          <p:cNvPr id="52" name="tile-1"/>
           <p:cNvSpPr/>
           <p:nvPr/>
         </p:nvSpPr>
         <p:spPr>
           <a:xfrm>
-            <a:off x="667512" y="3858768"/>
-            <a:ext cx="2505456" cy="749808"/>
+            <a:off x="667512" y="3931920"/>
+            <a:ext cx="2505456" cy="685800"/>
           </a:xfrm>
           <a:prstGeom prst="roundRect">
             <a:avLst>
-              <a:gd name="adj" fmla="val 36585"/>
+              <a:gd name="adj" fmla="val 40000"/>
             </a:avLst>
           </a:prstGeom>
           <a:solidFill>
@@ -6293,14 +6467,14 @@
       </p:sp>
       <p:sp>
         <p:nvSpPr>
-          <p:cNvPr id="48" name="tile-1-value"/>
-          <p:cNvSpPr txBox="1"/>
-          <p:nvPr/>
-        </p:nvSpPr>
-        <p:spPr>
-          <a:xfrm>
-            <a:off x="896112" y="3895344"/>
-            <a:ext cx="2103120" cy="292608"/>
+          <p:cNvPr id="53" name="tile-1-value"/>
+          <p:cNvSpPr txBox="1"/>
+          <p:nvPr/>
+        </p:nvSpPr>
+        <p:spPr>
+          <a:xfrm>
+            <a:off x="896112" y="3959352"/>
+            <a:ext cx="2103120" cy="274320"/>
           </a:xfrm>
           <a:prstGeom prst="rect">
             <a:avLst/>
@@ -6316,7 +6490,7 @@
               <a:buNone/>
             </a:pPr>
             <a:r>
-              <a:rPr lang="en-US" sz="1500" dirty="0">
+              <a:rPr lang="en-US" sz="1400" dirty="0">
                 <a:solidFill>
                   <a:schemeClr val="tx1"/>
                 </a:solidFill>
@@ -6324,22 +6498,22 @@
                 <a:ea typeface="Inter" pitchFamily="34" charset="-122"/>
                 <a:cs typeface="Inter" pitchFamily="34" charset="-120"/>
               </a:rPr>
-              <a:t>6 из 6</a:t>
-            </a:r>
-            <a:endParaRPr lang="en-US" sz="1500" dirty="0"/>
-          </a:p>
-        </p:txBody>
-      </p:sp>
-      <p:sp>
-        <p:nvSpPr>
-          <p:cNvPr id="49" name="tile-1-label"/>
-          <p:cNvSpPr txBox="1"/>
-          <p:nvPr/>
-        </p:nvSpPr>
-        <p:spPr>
-          <a:xfrm>
-            <a:off x="896112" y="4187952"/>
-            <a:ext cx="2103120" cy="365760"/>
+              <a:t>6 из 6 · Gazebo</a:t>
+            </a:r>
+            <a:endParaRPr lang="en-US" sz="1400" dirty="0"/>
+          </a:p>
+        </p:txBody>
+      </p:sp>
+      <p:sp>
+        <p:nvSpPr>
+          <p:cNvPr id="54" name="tile-1-label"/>
+          <p:cNvSpPr txBox="1"/>
+          <p:nvPr/>
+        </p:nvSpPr>
+        <p:spPr>
+          <a:xfrm>
+            <a:off x="896112" y="4224528"/>
+            <a:ext cx="2103120" cy="347472"/>
           </a:xfrm>
           <a:prstGeom prst="rect">
             <a:avLst/>
@@ -6363,7 +6537,7 @@
                 <a:ea typeface="Inter" pitchFamily="34" charset="-122"/>
                 <a:cs typeface="Inter" pitchFamily="34" charset="-120"/>
               </a:rPr>
-              <a:t>прогонов показа в Gazebo: 7 из 7 образцов, без штрафов</a:t>
+              <a:t>засчитанных прогонов показа: 7 из 7 образцов, без штрафов</a:t>
             </a:r>
             <a:endParaRPr lang="en-US" sz="900" dirty="0"/>
           </a:p>
@@ -6371,18 +6545,18 @@
       </p:sp>
       <p:sp>
         <p:nvSpPr>
-          <p:cNvPr id="50" name="tile-2"/>
+          <p:cNvPr id="55" name="tile-2"/>
           <p:cNvSpPr/>
           <p:nvPr/>
         </p:nvSpPr>
         <p:spPr>
           <a:xfrm>
-            <a:off x="3319272" y="3858768"/>
-            <a:ext cx="2505456" cy="749808"/>
+            <a:off x="3319272" y="3931920"/>
+            <a:ext cx="2505456" cy="685800"/>
           </a:xfrm>
           <a:prstGeom prst="roundRect">
             <a:avLst>
-              <a:gd name="adj" fmla="val 36585"/>
+              <a:gd name="adj" fmla="val 40000"/>
             </a:avLst>
           </a:prstGeom>
           <a:solidFill>
@@ -6393,14 +6567,14 @@
       </p:sp>
       <p:sp>
         <p:nvSpPr>
-          <p:cNvPr id="51" name="tile-2-value"/>
-          <p:cNvSpPr txBox="1"/>
-          <p:nvPr/>
-        </p:nvSpPr>
-        <p:spPr>
-          <a:xfrm>
-            <a:off x="3547872" y="3895344"/>
-            <a:ext cx="2103120" cy="292608"/>
+          <p:cNvPr id="56" name="tile-2-value"/>
+          <p:cNvSpPr txBox="1"/>
+          <p:nvPr/>
+        </p:nvSpPr>
+        <p:spPr>
+          <a:xfrm>
+            <a:off x="3547872" y="3959352"/>
+            <a:ext cx="2103120" cy="274320"/>
           </a:xfrm>
           <a:prstGeom prst="rect">
             <a:avLst/>
@@ -6416,7 +6590,7 @@
               <a:buNone/>
             </a:pPr>
             <a:r>
-              <a:rPr lang="en-US" sz="1500" dirty="0">
+              <a:rPr lang="en-US" sz="1400" dirty="0">
                 <a:solidFill>
                   <a:schemeClr val="tx1"/>
                 </a:solidFill>
@@ -6426,20 +6600,20 @@
               </a:rPr>
               <a:t>45–46 из 48</a:t>
             </a:r>
-            <a:endParaRPr lang="en-US" sz="1500" dirty="0"/>
-          </a:p>
-        </p:txBody>
-      </p:sp>
-      <p:sp>
-        <p:nvSpPr>
-          <p:cNvPr id="52" name="tile-2-label"/>
-          <p:cNvSpPr txBox="1"/>
-          <p:nvPr/>
-        </p:nvSpPr>
-        <p:spPr>
-          <a:xfrm>
-            <a:off x="3547872" y="4187952"/>
-            <a:ext cx="2103120" cy="365760"/>
+            <a:endParaRPr lang="en-US" sz="1400" dirty="0"/>
+          </a:p>
+        </p:txBody>
+      </p:sp>
+      <p:sp>
+        <p:nvSpPr>
+          <p:cNvPr id="57" name="tile-2-label"/>
+          <p:cNvSpPr txBox="1"/>
+          <p:nvPr/>
+        </p:nvSpPr>
+        <p:spPr>
+          <a:xfrm>
+            <a:off x="3547872" y="4224528"/>
+            <a:ext cx="2103120" cy="347472"/>
           </a:xfrm>
           <a:prstGeom prst="rect">
             <a:avLst/>
@@ -6471,18 +6645,18 @@
       </p:sp>
       <p:sp>
         <p:nvSpPr>
-          <p:cNvPr id="53" name="tile-3"/>
+          <p:cNvPr id="58" name="tile-3"/>
           <p:cNvSpPr/>
           <p:nvPr/>
         </p:nvSpPr>
         <p:spPr>
           <a:xfrm>
-            <a:off x="5971032" y="3858768"/>
-            <a:ext cx="2505456" cy="749808"/>
+            <a:off x="5971032" y="3931920"/>
+            <a:ext cx="2505456" cy="685800"/>
           </a:xfrm>
           <a:prstGeom prst="roundRect">
             <a:avLst>
-              <a:gd name="adj" fmla="val 36585"/>
+              <a:gd name="adj" fmla="val 40000"/>
             </a:avLst>
           </a:prstGeom>
           <a:solidFill>
@@ -6493,14 +6667,14 @@
       </p:sp>
       <p:sp>
         <p:nvSpPr>
-          <p:cNvPr id="54" name="tile-3-value"/>
-          <p:cNvSpPr txBox="1"/>
-          <p:nvPr/>
-        </p:nvSpPr>
-        <p:spPr>
-          <a:xfrm>
-            <a:off x="6199632" y="3895344"/>
-            <a:ext cx="2103120" cy="292608"/>
+          <p:cNvPr id="59" name="tile-3-value"/>
+          <p:cNvSpPr txBox="1"/>
+          <p:nvPr/>
+        </p:nvSpPr>
+        <p:spPr>
+          <a:xfrm>
+            <a:off x="6199632" y="3959352"/>
+            <a:ext cx="2103120" cy="274320"/>
           </a:xfrm>
           <a:prstGeom prst="rect">
             <a:avLst/>
@@ -6516,7 +6690,7 @@
               <a:buNone/>
             </a:pPr>
             <a:r>
-              <a:rPr lang="en-US" sz="1500" dirty="0">
+              <a:rPr lang="en-US" sz="1400" dirty="0">
                 <a:solidFill>
                   <a:schemeClr val="tx1"/>
                 </a:solidFill>
@@ -6526,20 +6700,20 @@
               </a:rPr>
               <a:t>9 из 10</a:t>
             </a:r>
-            <a:endParaRPr lang="en-US" sz="1500" dirty="0"/>
-          </a:p>
-        </p:txBody>
-      </p:sp>
-      <p:sp>
-        <p:nvSpPr>
-          <p:cNvPr id="55" name="tile-3-label"/>
-          <p:cNvSpPr txBox="1"/>
-          <p:nvPr/>
-        </p:nvSpPr>
-        <p:spPr>
-          <a:xfrm>
-            <a:off x="6199632" y="4187952"/>
-            <a:ext cx="2103120" cy="365760"/>
+            <a:endParaRPr lang="en-US" sz="1400" dirty="0"/>
+          </a:p>
+        </p:txBody>
+      </p:sp>
+      <p:sp>
+        <p:nvSpPr>
+          <p:cNvPr id="60" name="tile-3-label"/>
+          <p:cNvSpPr txBox="1"/>
+          <p:nvPr/>
+        </p:nvSpPr>
+        <p:spPr>
+          <a:xfrm>
+            <a:off x="6199632" y="4224528"/>
+            <a:ext cx="2103120" cy="347472"/>
           </a:xfrm>
           <a:prstGeom prst="rect">
             <a:avLst/>
@@ -6563,7 +6737,7 @@
                 <a:ea typeface="Inter" pitchFamily="34" charset="-122"/>
                 <a:cs typeface="Inter" pitchFamily="34" charset="-120"/>
               </a:rPr>
-              <a:t>гипотез, отмеченных роботом как подтверждённые, верны</a:t>
+              <a:t>подтверждённых роботом гипотез верны (базовые правила)</a:t>
             </a:r>
             <a:endParaRPr lang="en-US" sz="900" dirty="0"/>
           </a:p>
@@ -7434,7 +7608,7 @@
                 <a:ea typeface="Inter" pitchFamily="34" charset="-122"/>
                 <a:cs typeface="Inter" pitchFamily="34" charset="-120"/>
               </a:rPr>
-              <a:t>282</a:t>
+              <a:t>304</a:t>
             </a:r>
             <a:endParaRPr lang="en-US" sz="2400" dirty="0"/>
           </a:p>
@@ -7515,7 +7689,7 @@
                 <a:ea typeface="Inter" pitchFamily="34" charset="-122"/>
                 <a:cs typeface="Inter" pitchFamily="34" charset="-120"/>
               </a:rPr>
-              <a:t>1022</a:t>
+              <a:t>1000+</a:t>
             </a:r>
             <a:endParaRPr lang="en-US" sz="2400" dirty="0"/>
           </a:p>
@@ -7677,7 +7851,7 @@
                 <a:ea typeface="Inter" pitchFamily="34" charset="-122"/>
                 <a:cs typeface="Inter" pitchFamily="34" charset="-120"/>
               </a:rPr>
-              <a:t>19 из 20</a:t>
+              <a:t>21 из 22</a:t>
             </a:r>
             <a:endParaRPr lang="en-US" sz="2400" dirty="0"/>
           </a:p>
@@ -8434,7 +8608,7 @@
                 <a:ea typeface="Inter" pitchFamily="34" charset="-122"/>
                 <a:cs typeface="Inter" pitchFamily="34" charset="-120"/>
               </a:rPr>
-              <a:t>Две части: главное утверждение и механизм. Вторая часть подтвердилась не целиком</a:t>
+              <a:t>Главное утверждение и механизм; вторая часть подтвердилась не целиком (быстрый симулятор)</a:t>
             </a:r>
             <a:endParaRPr lang="en-US" sz="1150" dirty="0"/>
           </a:p>
@@ -8448,12 +8622,12 @@
         </p:nvSpPr>
         <p:spPr>
           <a:xfrm>
-            <a:off x="5989320" y="109728"/>
-            <a:ext cx="2487168" cy="237744"/>
+            <a:off x="5989320" y="155448"/>
+            <a:ext cx="2487168" cy="219456"/>
           </a:xfrm>
           <a:prstGeom prst="roundRect">
             <a:avLst>
-              <a:gd name="adj" fmla="val 50000"/>
+              <a:gd name="adj" fmla="val 54167"/>
             </a:avLst>
           </a:prstGeom>
           <a:solidFill>
@@ -8659,8 +8833,8 @@
         </p:nvSpPr>
         <p:spPr>
           <a:xfrm>
-            <a:off x="667512" y="4261104"/>
-            <a:ext cx="3749040" cy="274320"/>
+            <a:off x="667512" y="4224528"/>
+            <a:ext cx="3749040" cy="365760"/>
           </a:xfrm>
           <a:prstGeom prst="rect">
             <a:avLst/>
@@ -8684,7 +8858,7 @@
                 <a:ea typeface="Inter" pitchFamily="34" charset="-122"/>
                 <a:cs typeface="Inter" pitchFamily="34" charset="-120"/>
               </a:rPr>
-              <a:t>Опровергает: 95% интервал разности включает ноль</a:t>
+              <a:t>Интервал целиком ниже нуля — опровергнута; включает ноль — выигрыш не показан</a:t>
             </a:r>
             <a:endParaRPr lang="en-US" sz="1000" dirty="0"/>
           </a:p>
@@ -9279,7 +9453,7 @@
                 <a:ea typeface="Inter" pitchFamily="34" charset="-122"/>
                 <a:cs typeface="Inter" pitchFamily="34" charset="-120"/>
               </a:rPr>
-              <a:t>Г2 · цена грунта</a:t>
+              <a:t>Г2 · учёт цены грунта</a:t>
             </a:r>
             <a:endParaRPr lang="en-US" sz="1100" dirty="0"/>
           </a:p>
@@ -9383,7 +9557,7 @@
                 <a:ea typeface="Inter" pitchFamily="34" charset="-122"/>
                 <a:cs typeface="Inter" pitchFamily="34" charset="-120"/>
               </a:rPr>
-              <a:t>Г2 · смена грунта</a:t>
+              <a:t>Г2 · смена грунта (эффект смены)</a:t>
             </a:r>
             <a:endParaRPr lang="en-US" sz="1100" dirty="0"/>
           </a:p>
@@ -9464,7 +9638,7 @@
                 <a:ea typeface="Inter" pitchFamily="34" charset="-122"/>
                 <a:cs typeface="Inter" pitchFamily="34" charset="-120"/>
               </a:rPr>
-              <a:t>Итог: Г1 подтверждена; Г2 — для датчика и запаса на возврат, для грунта не подтверждена</a:t>
+              <a:t>Итог: Г1 подтверждена; Г2 — для датчика и запаса на возврат; для грунта выигрыш не показан</a:t>
             </a:r>
             <a:endParaRPr lang="en-US" sz="1050" dirty="0"/>
           </a:p>
@@ -9633,12 +9807,12 @@
         </p:nvSpPr>
         <p:spPr>
           <a:xfrm>
-            <a:off x="5989320" y="109728"/>
-            <a:ext cx="2487168" cy="237744"/>
+            <a:off x="5989320" y="155448"/>
+            <a:ext cx="2487168" cy="219456"/>
           </a:xfrm>
           <a:prstGeom prst="roundRect">
             <a:avLst>
-              <a:gd name="adj" fmla="val 50000"/>
+              <a:gd name="adj" fmla="val 54167"/>
             </a:avLst>
           </a:prstGeom>
           <a:solidFill>
@@ -9735,8 +9909,8 @@
         </p:nvSpPr>
         <p:spPr>
           <a:xfrm>
-            <a:off x="6263640" y="1627632"/>
-            <a:ext cx="1737360" cy="868680"/>
+            <a:off x="6263640" y="1572768"/>
+            <a:ext cx="1737360" cy="1005840"/>
           </a:xfrm>
           <a:prstGeom prst="rect">
             <a:avLst/>
@@ -9778,6 +9952,23 @@
                 <a:cs typeface="Inter" pitchFamily="34" charset="-120"/>
               </a:rPr>
               <a:t>очка [7,4; 19,0]</a:t>
+            </a:r>
+            <a:endParaRPr lang="en-US" sz="1100" dirty="0"/>
+          </a:p>
+          <a:p>
+            <a:pPr algn="ctr" indent="0" marL="0">
+              <a:buNone/>
+            </a:pPr>
+            <a:r>
+              <a:rPr lang="en-US" sz="900" dirty="0">
+                <a:solidFill>
+                  <a:schemeClr val="tx2"/>
+                </a:solidFill>
+                <a:latin typeface="Inter" pitchFamily="34" charset="0"/>
+                <a:ea typeface="Inter" pitchFamily="34" charset="-122"/>
+                <a:cs typeface="Inter" pitchFamily="34" charset="-120"/>
+              </a:rPr>
+              <a:t>быстрый симулятор</a:t>
             </a:r>
             <a:endParaRPr lang="en-US" sz="1100" dirty="0"/>
           </a:p>
@@ -9816,7 +10007,7 @@
                 <a:ea typeface="Inter" pitchFamily="34" charset="-122"/>
                 <a:cs typeface="Inter" pitchFamily="34" charset="-120"/>
               </a:rPr>
-              <a:t>В испытанных вариантах знание о среде весит больше порядка обхода: подсказка мест образцов дала +14,5 очка, замена порядка обхода при известных местах — +1,6</a:t>
+              <a:t>Число измерено для робота, который обновляет карту и перестраивает поиск; расследования с опытами показаны отдельным прогоном (пример 2)</a:t>
             </a:r>
             <a:endParaRPr lang="en-US" sz="1000" dirty="0"/>
           </a:p>
@@ -9914,7 +10105,7 @@
                 <a:ea typeface="Inter" pitchFamily="34" charset="-122"/>
                 <a:cs typeface="Inter" pitchFamily="34" charset="-120"/>
               </a:rPr>
-              <a:t>Два робота на одних и тех же 40 сценариях трудного уровня: «план заранее» и «исследователь». Разность счёта — на каждом сценарии.</a:t>
+              <a:t>Два робота на одних и тех же 40 сценариях трудного уровня: «план заранее» и «с адаптацией». Разность счёта — на каждом сценарии.</a:t>
             </a:r>
             <a:endParaRPr lang="en-US" sz="1050" dirty="0"/>
           </a:p>
@@ -10110,7 +10301,7 @@
                 <a:ea typeface="Inter" pitchFamily="34" charset="-122"/>
                 <a:cs typeface="Inter" pitchFamily="34" charset="-120"/>
               </a:rPr>
-              <a:t>95% интервал разности счёта включает ноль или лежит ниже нуля.</a:t>
+              <a:t>95% интервал разности целиком ниже нуля. Если он включает ноль — выигрыш не показан.</a:t>
             </a:r>
             <a:endParaRPr lang="en-US" sz="1050" dirty="0"/>
           </a:p>
@@ -10279,12 +10470,12 @@
         </p:nvSpPr>
         <p:spPr>
           <a:xfrm>
-            <a:off x="5989320" y="109728"/>
-            <a:ext cx="2487168" cy="237744"/>
+            <a:off x="5989320" y="155448"/>
+            <a:ext cx="2487168" cy="219456"/>
           </a:xfrm>
           <a:prstGeom prst="roundRect">
             <a:avLst>
-              <a:gd name="adj" fmla="val 50000"/>
+              <a:gd name="adj" fmla="val 54167"/>
             </a:avLst>
           </a:prstGeom>
           <a:solidFill>
@@ -10509,7 +10700,7 @@
                 <a:ea typeface="Inter" pitchFamily="34" charset="-122"/>
                 <a:cs typeface="Inter" pitchFamily="34" charset="-120"/>
               </a:rPr>
-              <a:t>z = 0,53  →  d = (1 − 0,53)·2 = 0,95 м: образец на кольце</a:t>
+              <a:t>z = 0,53  →  d ≈ (1 − 0,53)·2 = 0,95 м: образец на кольце</a:t>
             </a:r>
             <a:endParaRPr lang="en-US" sz="1100" dirty="0"/>
           </a:p>
@@ -10627,7 +10818,7 @@
                 <a:ea typeface="Inter" pitchFamily="34" charset="-122"/>
                 <a:cs typeface="Inter" pitchFamily="34" charset="-120"/>
               </a:rPr>
-              <a:t>m̂ = ΔB / (2,5·Δs)</a:t>
+              <a:t>m̂ ≈ (ΔB − 0,01·Δt) / (2,5·Δs)</a:t>
             </a:r>
             <a:endParaRPr lang="en-US" sz="1100" dirty="0"/>
           </a:p>
@@ -11255,7 +11446,7 @@
                 <a:ea typeface="Inter" pitchFamily="34" charset="-122"/>
                 <a:cs typeface="Inter" pitchFamily="34" charset="-120"/>
               </a:rPr>
-              <a:t>Одна карта, один агент; различается только то, кто выбирает подцели: правило или языковая модель</a:t>
+              <a:t>Один исполнитель; подцели выбирает правило (текст миссии не читает) или языковая модель</a:t>
             </a:r>
             <a:endParaRPr lang="en-US" sz="1150" dirty="0"/>
           </a:p>
@@ -11269,12 +11460,12 @@
         </p:nvSpPr>
         <p:spPr>
           <a:xfrm>
-            <a:off x="5989320" y="109728"/>
-            <a:ext cx="2487168" cy="237744"/>
+            <a:off x="5989320" y="155448"/>
+            <a:ext cx="2487168" cy="219456"/>
           </a:xfrm>
           <a:prstGeom prst="roundRect">
             <a:avLst>
-              <a:gd name="adj" fmla="val 50000"/>
+              <a:gd name="adj" fmla="val 54167"/>
             </a:avLst>
           </a:prstGeom>
           <a:solidFill>
@@ -11698,7 +11889,7 @@
         <p:spPr>
           <a:xfrm>
             <a:off x="4983480" y="3703320"/>
-            <a:ext cx="3493008" cy="201168"/>
+            <a:ext cx="3493008" cy="329184"/>
           </a:xfrm>
           <a:prstGeom prst="rect">
             <a:avLst/>
@@ -11722,7 +11913,7 @@
                 <a:ea typeface="Inter" pitchFamily="34" charset="-122"/>
                 <a:cs typeface="Inter" pitchFamily="34" charset="-120"/>
               </a:rPr>
-              <a:t>миссий выполняет каждая из трёх моделей МАИ; правило — 0 из 48</a:t>
+              <a:t>прогонов по четырём миссиям выполняет каждая из трёх моделей МАИ; правило — 0 из 48</a:t>
             </a:r>
             <a:endParaRPr lang="en-US" sz="1000" dirty="0"/>
           </a:p>
@@ -11761,7 +11952,7 @@
                 <a:ea typeface="Inter" pitchFamily="34" charset="-122"/>
                 <a:cs typeface="Inter" pitchFamily="34" charset="-120"/>
               </a:rPr>
-              <a:t>Быстрый симулятор; время ответа модели в этом опыте не учитывается. На обычной миссии модель выбирает то же, что правило; ответ идёт 15–25 с, поэтому на показе решает правило</a:t>
+              <a:t>Быстрый симулятор; время ответа модели не учитывается. Модель получает текст миссии и сводку состояния. На обычной миссии модель выбирает то же, что правило; ответ идёт 15–25 с, поэтому на показе решает правило</a:t>
             </a:r>
             <a:endParaRPr lang="en-US" sz="950" dirty="0"/>
           </a:p>
@@ -11930,12 +12121,12 @@
         </p:nvSpPr>
         <p:spPr>
           <a:xfrm>
-            <a:off x="5989320" y="109728"/>
-            <a:ext cx="2487168" cy="237744"/>
+            <a:off x="5989320" y="155448"/>
+            <a:ext cx="2487168" cy="219456"/>
           </a:xfrm>
           <a:prstGeom prst="roundRect">
             <a:avLst>
-              <a:gd name="adj" fmla="val 50000"/>
+              <a:gd name="adj" fmla="val 54167"/>
             </a:avLst>
           </a:prstGeom>
           <a:solidFill>
@@ -12061,7 +12252,7 @@
                 <a:ea typeface="Inter" pitchFamily="34" charset="-122"/>
                 <a:cs typeface="Inter" pitchFamily="34" charset="-120"/>
               </a:rPr>
-              <a:t>Поиск образцов и адаптация: +13,3 очка</a:t>
+              <a:t>Поиск образцов и адаптация: +13,3 очка (быстрый симулятор)</a:t>
             </a:r>
             <a:endParaRPr lang="en-US" sz="1100" dirty="0"/>
           </a:p>
@@ -12101,7 +12292,7 @@
                 <a:ea typeface="Inter" pitchFamily="34" charset="-122"/>
                 <a:cs typeface="Inter" pitchFamily="34" charset="-120"/>
               </a:rPr>
-              <a:t>LLM-планировщик: миссии словами 45–46 из 48</a:t>
+              <a:t>LLM читает миссии словами: 45–46 из 48</a:t>
             </a:r>
             <a:endParaRPr lang="en-US" sz="1100" dirty="0"/>
           </a:p>
@@ -12121,7 +12312,7 @@
                 <a:ea typeface="Inter" pitchFamily="34" charset="-122"/>
                 <a:cs typeface="Inter" pitchFamily="34" charset="-120"/>
               </a:rPr>
-              <a:t>SLAM-карта и два робота с координацией</a:t>
+              <a:t>Память о лаборатории между прогонами: +4,3</a:t>
             </a:r>
             <a:endParaRPr lang="en-US" sz="1100" dirty="0"/>
           </a:p>
@@ -12141,7 +12332,7 @@
                 <a:ea typeface="Inter" pitchFamily="34" charset="-122"/>
                 <a:cs typeface="Inter" pitchFamily="34" charset="-120"/>
               </a:rPr>
-              <a:t>1022 автоматические проверки</a:t>
+              <a:t>SLAM-карта и два робота с координацией</a:t>
             </a:r>
             <a:endParaRPr lang="en-US" sz="1100" dirty="0"/>
           </a:p>
@@ -12243,7 +12434,7 @@
                 <a:ea typeface="Inter" pitchFamily="34" charset="-122"/>
                 <a:cs typeface="Inter" pitchFamily="34" charset="-120"/>
               </a:rPr>
-              <a:t>Память между прогонами</a:t>
+              <a:t>Память при другом расписании событий лаборатории</a:t>
             </a:r>
             <a:endParaRPr lang="en-US" sz="1100" dirty="0"/>
           </a:p>
@@ -14224,7 +14415,7 @@
                 <a:ea typeface="Inter" pitchFamily="34" charset="-122"/>
                 <a:cs typeface="Inter" pitchFamily="34" charset="-120"/>
               </a:rPr>
-              <a:t>Два робота на одних и тех же 40 сценариях трудного уровня: «план заранее» и «исследователь». Разность счёта — на каждом сценарии.</a:t>
+              <a:t>Два робота на одних и тех же 40 сценариях трудного уровня: «план заранее» и «с адаптацией». Разность счёта — на каждом сценарии.</a:t>
             </a:r>
             <a:endParaRPr lang="en-US" sz="1050" dirty="0"/>
           </a:p>
@@ -14420,7 +14611,7 @@
                 <a:ea typeface="Inter" pitchFamily="34" charset="-122"/>
                 <a:cs typeface="Inter" pitchFamily="34" charset="-120"/>
               </a:rPr>
-              <a:t>95% интервал разности счёта включает ноль или лежит ниже нуля.</a:t>
+              <a:t>95% интервал разности целиком ниже нуля. Если он включает ноль — выигрыш не показан.</a:t>
             </a:r>
             <a:endParaRPr lang="en-US" sz="1050" dirty="0"/>
           </a:p>
@@ -14524,7 +14715,7 @@
         <p:spPr>
           <a:xfrm>
             <a:off x="960120" y="4261104"/>
-            <a:ext cx="4480560" cy="256032"/>
+            <a:ext cx="4754880" cy="256032"/>
           </a:xfrm>
           <a:prstGeom prst="rect">
             <a:avLst/>
@@ -14548,7 +14739,7 @@
                 <a:ea typeface="Inter" pitchFamily="34" charset="-122"/>
                 <a:cs typeface="Inter" pitchFamily="34" charset="-120"/>
               </a:rPr>
-              <a:t>выше в 29 из 40 сценариев; по возврату на базу разницы нет</a:t>
+              <a:t>быстрый симулятор; выше в 29 из 40 сценариев</a:t>
             </a:r>
             <a:endParaRPr lang="en-US" sz="1000" dirty="0"/>
           </a:p>
@@ -15072,7 +15263,7 @@
                 <a:ea typeface="Inter" pitchFamily="34" charset="-122"/>
                 <a:cs typeface="Inter" pitchFamily="34" charset="-120"/>
               </a:rPr>
-              <a:t>   (m — цена грунта)</a:t>
+              <a:t>   (m — цена грунта; зоны — отдельно)</a:t>
             </a:r>
             <a:endParaRPr lang="en-US" sz="1100" dirty="0"/>
           </a:p>
@@ -15087,7 +15278,7 @@
         <p:spPr>
           <a:xfrm>
             <a:off x="667512" y="2468880"/>
-            <a:ext cx="2487168" cy="2139696"/>
+            <a:ext cx="2743200" cy="2139696"/>
           </a:xfrm>
           <a:prstGeom prst="roundRect">
             <a:avLst>
@@ -15109,7 +15300,7 @@
         <p:spPr>
           <a:xfrm>
             <a:off x="868680" y="2560320"/>
-            <a:ext cx="2084832" cy="274320"/>
+            <a:ext cx="2340864" cy="274320"/>
           </a:xfrm>
           <a:prstGeom prst="rect">
             <a:avLst/>
@@ -15147,8 +15338,8 @@
         </p:nvSpPr>
         <p:spPr>
           <a:xfrm>
-            <a:off x="868680" y="2907792"/>
-            <a:ext cx="2121408" cy="1645920"/>
+            <a:off x="868680" y="2889504"/>
+            <a:ext cx="2377440" cy="1682496"/>
           </a:xfrm>
           <a:prstGeom prst="rect">
             <a:avLst/>
@@ -15172,14 +15363,14 @@
                 <a:ea typeface="Inter" pitchFamily="34" charset="-122"/>
                 <a:cs typeface="Inter" pitchFamily="34" charset="-120"/>
               </a:rPr>
-              <a:t>Датчик образцов, шум σ = 0,05</a:t>
+              <a:t>Датчик: d — до ближайшего образца, шум σ = 0,05, z обрезан до [0; 1]</a:t>
             </a:r>
             <a:endParaRPr lang="en-US" sz="1100" dirty="0"/>
           </a:p>
           <a:p>
             <a:pPr indent="0" marL="0">
               <a:spcAft>
-                <a:spcPts val="700"/>
+                <a:spcPts val="500"/>
               </a:spcAft>
               <a:buNone/>
             </a:pPr>
@@ -15209,14 +15400,14 @@
                 <a:ea typeface="Inter" pitchFamily="34" charset="-122"/>
                 <a:cs typeface="Inter" pitchFamily="34" charset="-120"/>
               </a:rPr>
-              <a:t>Карта вероятностей: правило Байеса</a:t>
+              <a:t>Карта вероятностей: Байес по клеткам (схема), учтён ближайший образец</a:t>
             </a:r>
             <a:endParaRPr lang="en-US" sz="1100" dirty="0"/>
           </a:p>
           <a:p>
             <a:pPr indent="0" marL="0">
               <a:spcAft>
-                <a:spcPts val="700"/>
+                <a:spcPts val="500"/>
               </a:spcAft>
               <a:buNone/>
             </a:pPr>
@@ -15246,14 +15437,14 @@
                 <a:ea typeface="Inter" pitchFamily="34" charset="-122"/>
                 <a:cs typeface="Inter" pitchFamily="34" charset="-120"/>
               </a:rPr>
-              <a:t>Цена грунта по расходу на пути</a:t>
+              <a:t>Цена грунта: оценка на участке пути</a:t>
             </a:r>
             <a:endParaRPr lang="en-US" sz="1100" dirty="0"/>
           </a:p>
           <a:p>
             <a:pPr indent="0" marL="0">
               <a:spcAft>
-                <a:spcPts val="700"/>
+                <a:spcPts val="500"/>
               </a:spcAft>
               <a:buNone/>
             </a:pPr>
@@ -15266,7 +15457,7 @@
                 <a:ea typeface="Inter" pitchFamily="34" charset="-122"/>
                 <a:cs typeface="Inter" pitchFamily="34" charset="-120"/>
               </a:rPr>
-              <a:t>m̂ = ΔB / (2,5·Δs)</a:t>
+              <a:t>m̂ ≈ (ΔB − 0,01·Δt) / (2,5·Δs)</a:t>
             </a:r>
             <a:endParaRPr lang="en-US" sz="1100" dirty="0"/>
           </a:p>
@@ -15280,8 +15471,8 @@
         </p:nvSpPr>
         <p:spPr>
           <a:xfrm>
-            <a:off x="3291840" y="2468880"/>
-            <a:ext cx="2724912" cy="2139696"/>
+            <a:off x="3547872" y="2468880"/>
+            <a:ext cx="2743200" cy="2139696"/>
           </a:xfrm>
           <a:prstGeom prst="roundRect">
             <a:avLst>
@@ -15302,8 +15493,8 @@
         </p:nvSpPr>
         <p:spPr>
           <a:xfrm>
-            <a:off x="3493008" y="2560320"/>
-            <a:ext cx="2322576" cy="274320"/>
+            <a:off x="3749040" y="2560320"/>
+            <a:ext cx="2340864" cy="274320"/>
           </a:xfrm>
           <a:prstGeom prst="rect">
             <a:avLst/>
@@ -15341,8 +15532,8 @@
         </p:nvSpPr>
         <p:spPr>
           <a:xfrm>
-            <a:off x="3493008" y="2907792"/>
-            <a:ext cx="2359152" cy="1645920"/>
+            <a:off x="3749040" y="2889504"/>
+            <a:ext cx="2377440" cy="1682496"/>
           </a:xfrm>
           <a:prstGeom prst="rect">
             <a:avLst/>
@@ -15373,7 +15564,7 @@
           <a:p>
             <a:pPr indent="0" marL="0">
               <a:spcAft>
-                <a:spcPts val="700"/>
+                <a:spcPts val="500"/>
               </a:spcAft>
               <a:buNone/>
             </a:pPr>
@@ -15386,7 +15577,7 @@
                 <a:ea typeface="Inter" pitchFamily="34" charset="-122"/>
                 <a:cs typeface="Inter" pitchFamily="34" charset="-120"/>
               </a:rPr>
-              <a:t>вес ребра = 2,5·m̂·длина</a:t>
+              <a:t>вес ребра = длина × цена клеток m̂, плюс запас у стен и зон</a:t>
             </a:r>
             <a:endParaRPr lang="en-US" sz="1100" dirty="0"/>
           </a:p>
@@ -15410,7 +15601,7 @@
           <a:p>
             <a:pPr indent="0" marL="0">
               <a:spcAft>
-                <a:spcPts val="700"/>
+                <a:spcPts val="500"/>
               </a:spcAft>
               <a:buNone/>
             </a:pPr>
@@ -15447,7 +15638,7 @@
           <a:p>
             <a:pPr indent="0" marL="0">
               <a:spcAft>
-                <a:spcPts val="700"/>
+                <a:spcPts val="500"/>
               </a:spcAft>
               <a:buNone/>
             </a:pPr>
@@ -15474,12 +15665,12 @@
         </p:nvSpPr>
         <p:spPr>
           <a:xfrm>
-            <a:off x="6153912" y="2468880"/>
-            <a:ext cx="2322576" cy="2139696"/>
+            <a:off x="6428232" y="2468880"/>
+            <a:ext cx="2048256" cy="2139696"/>
           </a:xfrm>
           <a:prstGeom prst="roundRect">
             <a:avLst>
-              <a:gd name="adj" fmla="val 11111"/>
+              <a:gd name="adj" fmla="val 11607"/>
             </a:avLst>
           </a:prstGeom>
           <a:solidFill>
@@ -15496,8 +15687,8 @@
         </p:nvSpPr>
         <p:spPr>
           <a:xfrm>
-            <a:off x="6355080" y="2560320"/>
-            <a:ext cx="1920240" cy="274320"/>
+            <a:off x="6629400" y="2560320"/>
+            <a:ext cx="1645920" cy="274320"/>
           </a:xfrm>
           <a:prstGeom prst="rect">
             <a:avLst/>
@@ -15521,7 +15712,7 @@
                 <a:ea typeface="Inter" pitchFamily="34" charset="-122"/>
                 <a:cs typeface="Inter" pitchFamily="34" charset="-120"/>
               </a:rPr>
-              <a:t>Метрики и почему они</a:t>
+              <a:t>Почему эти метрики</a:t>
             </a:r>
             <a:endParaRPr lang="en-US" sz="1250" dirty="0"/>
           </a:p>
@@ -15535,8 +15726,8 @@
         </p:nvSpPr>
         <p:spPr>
           <a:xfrm>
-            <a:off x="6355080" y="2907792"/>
-            <a:ext cx="1956816" cy="1645920"/>
+            <a:off x="6629400" y="2889504"/>
+            <a:ext cx="1682496" cy="1682496"/>
           </a:xfrm>
           <a:prstGeom prst="rect">
             <a:avLst/>
@@ -15567,7 +15758,7 @@
           <a:p>
             <a:pPr indent="0" marL="0">
               <a:spcAft>
-                <a:spcPts val="700"/>
+                <a:spcPts val="500"/>
               </a:spcAft>
               <a:buNone/>
             </a:pPr>
@@ -15604,7 +15795,7 @@
           <a:p>
             <a:pPr indent="0" marL="0">
               <a:spcAft>
-                <a:spcPts val="700"/>
+                <a:spcPts val="500"/>
               </a:spcAft>
               <a:buNone/>
             </a:pPr>
@@ -15641,7 +15832,7 @@
           <a:p>
             <a:pPr indent="0" marL="0">
               <a:spcAft>
-                <a:spcPts val="700"/>
+                <a:spcPts val="500"/>
               </a:spcAft>
               <a:buNone/>
             </a:pPr>
@@ -15654,7 +15845,7 @@
                 <a:ea typeface="Inter" pitchFamily="34" charset="-122"/>
                 <a:cs typeface="Inter" pitchFamily="34" charset="-120"/>
               </a:rPr>
-              <a:t>Δᵢ = J₁(sᵢ) − J₂(sᵢ), 95% интервал: «лучше», если он выше нуля</a:t>
+              <a:t>Δᵢ = J₁(sᵢ) − J₂(sᵢ), 95% интервал; «лучше» — если он выше нуля</a:t>
             </a:r>
             <a:endParaRPr lang="en-US" sz="1100" dirty="0"/>
           </a:p>
@@ -16679,7 +16870,7 @@
                 <a:ea typeface="Inter" pitchFamily="34" charset="-122"/>
                 <a:cs typeface="Inter" pitchFamily="34" charset="-120"/>
               </a:rPr>
-              <a:t>Ресурсы: один ноутбук · прогон в Gazebo ≈ 2,5 мин · быстрый симулятор: 240 прогонов за 37 с · модели — сервер МАИ</a:t>
+              <a:t>Ресурсы: один ноутбук · прогон показа в Gazebo ≈ 2,5 мин · быстрый симулятор: 240 прогонов за 37 с · модели — сервер МАИ</a:t>
             </a:r>
             <a:endParaRPr lang="en-US" sz="950" dirty="0"/>
           </a:p>
@@ -17593,7 +17784,7 @@
                 <a:ea typeface="Inter" pitchFamily="34" charset="-122"/>
                 <a:cs typeface="Inter" pitchFamily="34" charset="-120"/>
               </a:rPr>
-              <a:t>вывод «сбой датчика»; ждёт 36 с: стоять стоит 0,01 ед/с, ехать вслепую — около 0,23</a:t>
+              <a:t>вывод «сбой датчика»; ждёт 36 с: стоять стоит 0,01 ед/с, ехать вслепую — около 0,22</a:t>
             </a:r>
             <a:endParaRPr lang="en-US" sz="1100" dirty="0"/>
           </a:p>
@@ -17952,7 +18143,7 @@
                 <a:ea typeface="Inter" pitchFamily="34" charset="-122"/>
                 <a:cs typeface="Inter" pitchFamily="34" charset="-120"/>
               </a:rPr>
-              <a:t>Пример 1. План заранее против исследователя</a:t>
+              <a:t>Пример 1. План заранее против робота с адаптацией</a:t>
             </a:r>
             <a:endParaRPr lang="en-US" sz="2280" dirty="0"/>
           </a:p>
@@ -18121,7 +18312,7 @@
                 <a:ea typeface="Inter" pitchFamily="34" charset="-122"/>
                 <a:cs typeface="Inter" pitchFamily="34" charset="-120"/>
               </a:rPr>
-              <a:t>Исследователь</a:t>
+              <a:t>С адаптацией</a:t>
             </a:r>
             <a:endParaRPr lang="en-US" sz="1100" dirty="0"/>
           </a:p>
@@ -18282,7 +18473,27 @@
                 <a:ea typeface="Inter" pitchFamily="34" charset="-122"/>
                 <a:cs typeface="Inter" pitchFamily="34" charset="-120"/>
               </a:rPr>
-              <a:t>40 трудных сценариев</a:t>
+              <a:t>40 трудных сценариев,</a:t>
+            </a:r>
+            <a:endParaRPr lang="en-US" sz="1000" dirty="0"/>
+          </a:p>
+          <a:p>
+            <a:pPr algn="ctr" indent="0" marL="0">
+              <a:spcAft>
+                <a:spcPts val="200"/>
+              </a:spcAft>
+              <a:buNone/>
+            </a:pPr>
+            <a:r>
+              <a:rPr lang="en-US" sz="1000" dirty="0">
+                <a:solidFill>
+                  <a:schemeClr val="tx1"/>
+                </a:solidFill>
+                <a:latin typeface="Inter" pitchFamily="34" charset="0"/>
+                <a:ea typeface="Inter" pitchFamily="34" charset="-122"/>
+                <a:cs typeface="Inter" pitchFamily="34" charset="-120"/>
+              </a:rPr>
+              <a:t>быстрый симулятор</a:t>
             </a:r>
             <a:endParaRPr lang="en-US" sz="1000" dirty="0"/>
           </a:p>
@@ -18343,7 +18554,7 @@
                 <a:ea typeface="Inter" pitchFamily="34" charset="-122"/>
                 <a:cs typeface="Inter" pitchFamily="34" charset="-120"/>
               </a:rPr>
-              <a:t>Тот же заряд, та же арена — больше образцов: выше в 29 из 40 сценариев. По возврату на базу разницы нет</a:t>
+              <a:t>Тот же заряд, та же арена — больше образцов: выше в 29 из 40 сценариев. По возврату на базу различие не показано</a:t>
             </a:r>
             <a:endParaRPr lang="en-US" sz="1050" dirty="0"/>
           </a:p>
@@ -19219,7 +19430,7 @@
                 <a:ea typeface="Inter" pitchFamily="34" charset="-122"/>
                 <a:cs typeface="Inter" pitchFamily="34" charset="-120"/>
               </a:rPr>
-              <a:t>В сериях 9 из 10 подтверждённых гипотез верны по скрытой правде. Выигрыш в очках от реакции на грунт не показан: +1,0 [−3,6; +5,4]</a:t>
+              <a:t>В сериях 9 из 10 подтверждённых гипотез верны по скрытой правде. Выигрыш в очках от учёта грунта не показан: +1,0 [−3,6; +5,4]</a:t>
             </a:r>
             <a:endParaRPr lang="en-US" sz="1050" dirty="0"/>
           </a:p>
